--- a/8. Concurrent Collections/ConcurrentCollections.pptx
+++ b/8. Concurrent Collections/ConcurrentCollections.pptx
@@ -852,7 +852,7 @@
           </a:p>
           <a:p>
             <a:r>
-              <a:t>You are about to fix all of that in a live market dashboard that quietly loses stock cards every time it renders.</a:t>
+              <a:t>You are about to fix all of that in a live market dashboard that quietly loses stock cards on almost every render.</a:t>
             </a:r>
           </a:p>
           <a:p>
@@ -1142,7 +1142,7 @@
           </a:p>
           <a:p>
             <a:r>
-              <a:t>Everything you need to change is in Dashboard.razor.cs, marked with five ToDo Refactor comments. Two of them are the collection types themselves. One is a read followed by a write on that dictionary. One is the counter increment. One is the timer field that two async methods both write.</a:t>
+              <a:t>Everything you need to change is in Dashboard.razor.cs, marked with eight ToDo Refactor comments, and each one names the step that checks it. Two of them are the collection types themselves. One is a read followed by a write on that dictionary. Two are the counter: how it is incremented and how it is read back. Three are about the timer field that two async methods both write: those two methods, and the DisposeAsync that has to clean up after them.</a:t>
             </a:r>
           </a:p>
           <a:p>
@@ -1150,7 +1150,7 @@
           </a:p>
           <a:p>
             <a:r>
-              <a:t>There is a sixth change that carries no ToDo comment at all: how that counter is read back. Finding it is part of the exercise.</a:t>
+              <a:t>The workshop guide docked beside the dashboard walks you through all of it in four steps, and a step unlocks only after the one before it passes. Every expected result that does not match comes with a hint, and the same hint shows up in the terminal running the app.</a:t>
             </a:r>
           </a:p>
           <a:p>
@@ -1158,7 +1158,7 @@
           </a:p>
           <a:p>
             <a:r>
-              <a:t>You have 25 minutes. Aim for 60 cards on the first paint and on every refresh after it, and a counter that climbs by exactly 60 every 2 seconds.</a:t>
+              <a:t>You have 25 minutes. Aim for 4 of 4 steps passing in the guide, 60 cards on the first paint and on every refresh after it, and a counter that climbs by exactly 60 every 2 seconds.</a:t>
             </a:r>
           </a:p>
           <a:p>
@@ -8497,7 +8497,7 @@
           <a:p>
             <a:r>
               <a:rPr lang="en-US" dirty="0"/>
-              <a:t>Five `// ToDo Refactor` comments, all in one file</a:t>
+              <a:t>Eight `// ToDo Refactor (Step N)` comments, all in one file</a:t>
             </a:r>
           </a:p>
           <a:p>
@@ -8509,7 +8509,7 @@
           <a:p>
             <a:r>
               <a:rPr lang="en-US" dirty="0"/>
-              <a:t>The compiler will not help you here</a:t>
+              <a:t>The compiler will not help, but the workshop guide will</a:t>
             </a:r>
           </a:p>
           <a:p>
